--- a/初赛PPT.pptx
+++ b/初赛PPT.pptx
@@ -16,7 +16,7 @@
     <p:sldId id="260" r:id="rId9"/>
     <p:sldId id="261" r:id="rId10"/>
     <p:sldId id="262" r:id="rId11"/>
-    <p:sldId id="264" r:id="rId12"/>
+    <p:sldId id="280" r:id="rId12"/>
     <p:sldId id="263" r:id="rId13"/>
     <p:sldId id="266" r:id="rId14"/>
     <p:sldId id="267" r:id="rId15"/>
@@ -594,6 +594,66 @@
 </file>
 
 <file path=ppt/notesSlides/notesSlide2.xml><?xml version="1.0" encoding="utf-8"?>
+<p:notes xmlns:a="http://schemas.openxmlformats.org/drawingml/2006/main" xmlns:r="http://schemas.openxmlformats.org/officeDocument/2006/relationships" xmlns:p="http://schemas.openxmlformats.org/presentationml/2006/main">
+  <p:cSld>
+    <p:spTree>
+      <p:nvGrpSpPr>
+        <p:cNvPr id="1" name=""/>
+        <p:cNvGrpSpPr/>
+        <p:nvPr/>
+      </p:nvGrpSpPr>
+      <p:grpSpPr>
+        <a:xfrm>
+          <a:off x="0" y="0"/>
+          <a:ext cx="0" cy="0"/>
+          <a:chOff x="0" y="0"/>
+          <a:chExt cx="0" cy="0"/>
+        </a:xfrm>
+      </p:grpSpPr>
+      <p:sp>
+        <p:nvSpPr>
+          <p:cNvPr id="2" name="Slide Image Placeholder 1"/>
+          <p:cNvSpPr>
+            <a:spLocks noGrp="1" noRot="1" noChangeAspect="1"/>
+          </p:cNvSpPr>
+          <p:nvPr>
+            <p:ph type="sldImg"/>
+          </p:nvPr>
+        </p:nvSpPr>
+        <p:spPr/>
+      </p:sp>
+      <p:sp>
+        <p:nvSpPr>
+          <p:cNvPr id="3" name="Notes Placeholder 2"/>
+          <p:cNvSpPr>
+            <a:spLocks noGrp="1"/>
+          </p:cNvSpPr>
+          <p:nvPr>
+            <p:ph type="body" idx="1"/>
+          </p:nvPr>
+        </p:nvSpPr>
+        <p:spPr/>
+        <p:txBody>
+          <a:bodyPr/>
+          <a:lstStyle/>
+          <a:p>
+            <a:r>
+              <a:rPr lang="zh-CN" dirty="0"/>
+              <a:t>这一页按时间线说明项目推进。三月下旬到四月上旬，团队先围绕赛题完成长上下文显存压力分析，阅读 vLLM KV connector、prefix cache 资料，并对 FlexKV、LMCache、Mooncake 等公开方案做横向调研，最终确定以 vLLM V1 connector 和 GPU、CPU、SSD 三层缓存为主路线。四月完成仓库、执行框架和 connector 接入链路搭建；五月集中实现 block 级缓存管理、三层缓存协同和跨层传输能力；六月补全缓存闭环、基准脚本和文档材料，形成可验证、可展示的阶段成果。</a:t>
+            </a:r>
+            <a:endParaRPr lang="zh-CN" dirty="0"/>
+          </a:p>
+        </p:txBody>
+      </p:sp>
+    </p:spTree>
+  </p:cSld>
+  <p:clrMapOvr>
+    <a:masterClrMapping/>
+  </p:clrMapOvr>
+</p:notes>
+</file>
+
+<file path=ppt/notesSlides/notesSlide3.xml><?xml version="1.0" encoding="utf-8"?>
 <p:notes xmlns:a="http://schemas.openxmlformats.org/drawingml/2006/main" xmlns:r="http://schemas.openxmlformats.org/officeDocument/2006/relationships" xmlns:p="http://schemas.openxmlformats.org/presentationml/2006/main">
   <p:cSld>
     <p:spTree>
@@ -8443,7 +8503,7 @@
         <p:spPr>
           <a:xfrm>
             <a:off x="2535096" y="5222423"/>
-            <a:ext cx="6796327" cy="1301750"/>
+            <a:ext cx="6796327" cy="1681480"/>
           </a:xfrm>
           <a:prstGeom prst="rect">
             <a:avLst/>
@@ -8480,7 +8540,35 @@
                 <a:cs typeface="方正小标宋简体" panose="03000509000000000000" charset="-122"/>
                 <a:sym typeface="+mn-ea"/>
               </a:rPr>
-              <a:t>汇报队伍：古法编程继承人 </a:t>
+              <a:t>汇报队伍：古法编程继承人</a:t>
+            </a:r>
+            <a:endParaRPr lang="zh-CN" altLang="en-US" sz="2000" b="1" dirty="0">
+              <a:solidFill>
+                <a:schemeClr val="bg1"/>
+              </a:solidFill>
+              <a:latin typeface="方正小标宋简体" panose="03000509000000000000" charset="-122"/>
+              <a:ea typeface="方正小标宋简体" panose="03000509000000000000" charset="-122"/>
+              <a:cs typeface="方正小标宋简体" panose="03000509000000000000" charset="-122"/>
+              <a:sym typeface="+mn-ea"/>
+            </a:endParaRPr>
+          </a:p>
+          <a:p>
+            <a:pPr indent="0" algn="ctr" fontAlgn="auto">
+              <a:lnSpc>
+                <a:spcPts val="2960"/>
+              </a:lnSpc>
+            </a:pPr>
+            <a:r>
+              <a:rPr lang="zh-CN" altLang="en-US" sz="2000" b="1" dirty="0">
+                <a:solidFill>
+                  <a:schemeClr val="bg1"/>
+                </a:solidFill>
+                <a:latin typeface="方正小标宋简体" panose="03000509000000000000" charset="-122"/>
+                <a:ea typeface="方正小标宋简体" panose="03000509000000000000" charset="-122"/>
+                <a:cs typeface="方正小标宋简体" panose="03000509000000000000" charset="-122"/>
+                <a:sym typeface="+mn-ea"/>
+              </a:rPr>
+              <a:t>成员：井光成，徐子淳，祁馨叶 </a:t>
             </a:r>
             <a:endParaRPr lang="zh-CN" altLang="en-US" sz="2000" b="1" dirty="0">
               <a:solidFill>
@@ -8781,7 +8869,7 @@
         <p:spPr>
           <a:xfrm>
             <a:off x="981837" y="2537936"/>
-            <a:ext cx="3379407" cy="337376"/>
+            <a:ext cx="3860800" cy="264160"/>
           </a:xfrm>
           <a:prstGeom prst="rect">
             <a:avLst/>
@@ -8807,7 +8895,29 @@
                 <a:ea typeface="微软雅黑" panose="020B0503020204020204" charset="-122"/>
                 <a:cs typeface="Arial" panose="020B0604020202020204"/>
               </a:rPr>
-              <a:t>✓ 启动成功：8B + vLLM 0.23 +</a:t>
+              <a:t>✓ 启动成功：</a:t>
+            </a:r>
+            <a:r>
+              <a:rPr lang="en-US" altLang="zh-CN" sz="1720" dirty="0">
+                <a:solidFill>
+                  <a:srgbClr val="0F1423"/>
+                </a:solidFill>
+                <a:latin typeface="Arial" panose="020B0604020202020204"/>
+                <a:ea typeface="微软雅黑" panose="020B0503020204020204" charset="-122"/>
+                <a:cs typeface="Arial" panose="020B0604020202020204"/>
+              </a:rPr>
+              <a:t>Qwen3-</a:t>
+            </a:r>
+            <a:r>
+              <a:rPr lang="zh-CN" sz="1720" dirty="0">
+                <a:solidFill>
+                  <a:srgbClr val="0F1423"/>
+                </a:solidFill>
+                <a:latin typeface="Arial" panose="020B0604020202020204"/>
+                <a:ea typeface="微软雅黑" panose="020B0503020204020204" charset="-122"/>
+                <a:cs typeface="Arial" panose="020B0604020202020204"/>
+              </a:rPr>
+              <a:t>8B + vLLM 0.23 +</a:t>
             </a:r>
             <a:endParaRPr lang="zh-CN" sz="1720" dirty="0">
               <a:solidFill>
@@ -24449,7 +24559,7 @@
         </p:nvSpPr>
         <p:spPr>
           <a:xfrm>
-            <a:off x="0" y="0"/>
+            <a:off x="0" y="19050"/>
             <a:ext cx="12192000" cy="6858000"/>
           </a:xfrm>
           <a:prstGeom prst="rect">
@@ -26409,7 +26519,7 @@
                 <a:ea typeface="黑体" panose="02010609060101010101" charset="-122"/>
                 <a:cs typeface="Arial" panose="020B0604020202020204"/>
               </a:rPr>
-              <a:t>项目开发进度与任务推进</a:t>
+              <a:t>项目时间线与阶段推进</a:t>
             </a:r>
             <a:endParaRPr lang="zh-CN" sz="3000" dirty="0">
               <a:solidFill>
@@ -26424,61 +26534,13 @@
       </p:sp>
       <p:sp>
         <p:nvSpPr>
-          <p:cNvPr id="5" name="TextBox 5"/>
-          <p:cNvSpPr txBox="1"/>
-          <p:nvPr/>
-        </p:nvSpPr>
-        <p:spPr>
-          <a:xfrm>
-            <a:off x="522732" y="954405"/>
-            <a:ext cx="12177522" cy="410718"/>
-          </a:xfrm>
-          <a:prstGeom prst="rect">
-            <a:avLst/>
-          </a:prstGeom>
-          <a:noFill/>
-          <a:ln>
-            <a:noFill/>
-          </a:ln>
-        </p:spPr>
-        <p:txBody>
-          <a:bodyPr wrap="none" lIns="0" tIns="0" rIns="0" bIns="0" anchor="t" anchorCtr="0">
-            <a:spAutoFit/>
-          </a:bodyPr>
-          <a:lstStyle/>
-          <a:p>
-            <a:pPr algn="l"/>
-            <a:r>
-              <a:rPr lang="zh-CN" sz="2100" dirty="0">
-                <a:solidFill>
-                  <a:srgbClr val="44546A"/>
-                </a:solidFill>
-                <a:latin typeface="Arial" panose="020B0604020202020204"/>
-                <a:ea typeface="微软雅黑" panose="020B0503020204020204" charset="-122"/>
-                <a:cs typeface="Arial" panose="020B0604020202020204"/>
-              </a:rPr>
-              <a:t>当前项目已经从赛题分析推进到架构实现、实验验证和汇报整理阶段，路径清晰且阶段成果明确。</a:t>
-            </a:r>
-            <a:endParaRPr lang="zh-CN" sz="2100" dirty="0">
-              <a:solidFill>
-                <a:srgbClr val="44546A"/>
-              </a:solidFill>
-              <a:latin typeface="Arial" panose="020B0604020202020204"/>
-              <a:ea typeface="微软雅黑" panose="020B0503020204020204" charset="-122"/>
-              <a:cs typeface="Arial" panose="020B0604020202020204"/>
-            </a:endParaRPr>
-          </a:p>
-        </p:txBody>
-      </p:sp>
-      <p:sp>
-        <p:nvSpPr>
           <p:cNvPr id="6" name="Rectangle 6"/>
           <p:cNvSpPr/>
           <p:nvPr/>
         </p:nvSpPr>
         <p:spPr>
           <a:xfrm>
-            <a:off x="685800" y="1676400"/>
+            <a:off x="685800" y="944245"/>
             <a:ext cx="10820400" cy="533400"/>
           </a:xfrm>
           <a:prstGeom prst="roundRect">
@@ -26502,7 +26564,7 @@
         </p:nvSpPr>
         <p:spPr>
           <a:xfrm>
-            <a:off x="1038606" y="1824990"/>
+            <a:off x="1038606" y="1092835"/>
             <a:ext cx="502920" cy="352044"/>
           </a:xfrm>
           <a:prstGeom prst="rect">
@@ -26550,7 +26612,7 @@
         </p:nvSpPr>
         <p:spPr>
           <a:xfrm>
-            <a:off x="3896106" y="1824990"/>
+            <a:off x="3896106" y="1092835"/>
             <a:ext cx="987552" cy="352044"/>
           </a:xfrm>
           <a:prstGeom prst="rect">
@@ -26577,7 +26639,7 @@
                 <a:ea typeface="黑体" panose="02010609060101010101" charset="-122"/>
                 <a:cs typeface="Arial" panose="020B0604020202020204"/>
               </a:rPr>
-              <a:t>主要任务</a:t>
+              <a:t>关键工作</a:t>
             </a:r>
             <a:endParaRPr lang="zh-CN" sz="1800" dirty="0">
               <a:solidFill>
@@ -26598,7 +26660,7 @@
         </p:nvSpPr>
         <p:spPr>
           <a:xfrm>
-            <a:off x="7515606" y="1824990"/>
+            <a:off x="7515606" y="1092835"/>
             <a:ext cx="745236" cy="352044"/>
           </a:xfrm>
           <a:prstGeom prst="rect">
@@ -26625,7 +26687,7 @@
                 <a:ea typeface="黑体" panose="02010609060101010101" charset="-122"/>
                 <a:cs typeface="Arial" panose="020B0604020202020204"/>
               </a:rPr>
-              <a:t>负责人</a:t>
+              <a:t>阶段产出</a:t>
             </a:r>
             <a:endParaRPr lang="zh-CN" sz="1800" dirty="0">
               <a:solidFill>
@@ -26646,7 +26708,7 @@
         </p:nvSpPr>
         <p:spPr>
           <a:xfrm>
-            <a:off x="9896856" y="1824990"/>
+            <a:off x="10092436" y="1089660"/>
             <a:ext cx="502920" cy="352044"/>
           </a:xfrm>
           <a:prstGeom prst="rect">
@@ -26694,10 +26756,10 @@
         </p:nvGrpSpPr>
         <p:grpSpPr>
           <a:xfrm>
-            <a:off x="685800" y="2209800"/>
-            <a:ext cx="10820400" cy="838200"/>
-            <a:chOff x="685800" y="2209800"/>
-            <a:chExt cx="10820400" cy="838200"/>
+            <a:off x="685800" y="1492250"/>
+            <a:ext cx="10820400" cy="1275080"/>
+            <a:chOff x="685800" y="1612900"/>
+            <a:chExt cx="10820400" cy="1275080"/>
           </a:xfrm>
         </p:grpSpPr>
         <p:sp>
@@ -26708,8 +26770,8 @@
           </p:nvSpPr>
           <p:spPr>
             <a:xfrm>
-              <a:off x="685800" y="2209800"/>
-              <a:ext cx="10820400" cy="838200"/>
+              <a:off x="685800" y="1612900"/>
+              <a:ext cx="10820400" cy="1275080"/>
             </a:xfrm>
             <a:prstGeom prst="rect">
               <a:avLst/>
@@ -26723,6 +26785,12 @@
               </a:solidFill>
             </a:ln>
           </p:spPr>
+          <p:txBody>
+            <a:bodyPr/>
+            <a:p>
+              <a:endParaRPr lang="zh-CN" altLang="en-US"/>
+            </a:p>
+          </p:txBody>
         </p:sp>
         <p:sp>
           <p:nvSpPr>
@@ -26732,7 +26800,7 @@
           </p:nvSpPr>
           <p:spPr>
             <a:xfrm>
-              <a:off x="1038606" y="2510790"/>
+              <a:off x="1037971" y="1764665"/>
               <a:ext cx="745236" cy="352044"/>
             </a:xfrm>
             <a:prstGeom prst="rect">
@@ -26759,7 +26827,7 @@
                   <a:ea typeface="黑体" panose="02010609060101010101" charset="-122"/>
                   <a:cs typeface="Arial" panose="020B0604020202020204"/>
                 </a:rPr>
-                <a:t>阶段一</a:t>
+                <a:t>调研定位</a:t>
               </a:r>
               <a:endParaRPr lang="zh-CN" sz="1800" dirty="0">
                 <a:solidFill>
@@ -26780,8 +26848,8 @@
           </p:nvSpPr>
           <p:spPr>
             <a:xfrm>
-              <a:off x="2642743" y="2451417"/>
-              <a:ext cx="4014978" cy="322707"/>
+              <a:off x="2642108" y="1705292"/>
+              <a:ext cx="4324985" cy="1015365"/>
             </a:xfrm>
             <a:prstGeom prst="rect">
               <a:avLst/>
@@ -26800,6 +26868,25 @@
               <a:pPr algn="l"/>
               <a:r>
                 <a:rPr lang="zh-CN" sz="1650" dirty="0">
+                  <a:ln/>
+                  <a:solidFill>
+                    <a:schemeClr val="accent1"/>
+                  </a:solidFill>
+                  <a:effectLst>
+                    <a:outerShdw blurRad="38100" dist="25400" dir="5400000" algn="ctr" rotWithShape="0">
+                      <a:srgbClr val="6E747A">
+                        <a:alpha val="43000"/>
+                      </a:srgbClr>
+                    </a:outerShdw>
+                  </a:effectLst>
+                  <a:latin typeface="Arial" panose="020B0604020202020204"/>
+                  <a:ea typeface="微软雅黑" panose="020B0503020204020204" charset="-122"/>
+                  <a:cs typeface="Arial" panose="020B0604020202020204"/>
+                </a:rPr>
+                <a:t>3.25 - 4.7</a:t>
+              </a:r>
+              <a:r>
+                <a:rPr lang="zh-CN" sz="1650" dirty="0">
                   <a:solidFill>
                     <a:srgbClr val="0F1423"/>
                   </a:solidFill>
@@ -26807,7 +26894,84 @@
                   <a:ea typeface="微软雅黑" panose="020B0503020204020204" charset="-122"/>
                   <a:cs typeface="Arial" panose="020B0604020202020204"/>
                 </a:rPr>
-                <a:t>赛题分析、资料搜集、技术路线初步调研</a:t>
+                <a:t>：围绕赛题集中调研，分析长上下文</a:t>
+              </a:r>
+              <a:endParaRPr lang="zh-CN" sz="1650" dirty="0">
+                <a:solidFill>
+                  <a:srgbClr val="0F1423"/>
+                </a:solidFill>
+                <a:latin typeface="Arial" panose="020B0604020202020204"/>
+                <a:ea typeface="微软雅黑" panose="020B0503020204020204" charset="-122"/>
+                <a:cs typeface="Arial" panose="020B0604020202020204"/>
+              </a:endParaRPr>
+            </a:p>
+            <a:p>
+              <a:pPr algn="l"/>
+              <a:r>
+                <a:rPr lang="zh-CN" sz="1650" dirty="0">
+                  <a:solidFill>
+                    <a:srgbClr val="0F1423"/>
+                  </a:solidFill>
+                  <a:latin typeface="Arial" panose="020B0604020202020204"/>
+                  <a:ea typeface="微软雅黑" panose="020B0503020204020204" charset="-122"/>
+                  <a:cs typeface="Arial" panose="020B0604020202020204"/>
+                </a:rPr>
+                <a:t>下 KV Cache 的显存占用与性能退化；阅读 vL</a:t>
+              </a:r>
+              <a:endParaRPr lang="zh-CN" sz="1650" dirty="0">
+                <a:solidFill>
+                  <a:srgbClr val="0F1423"/>
+                </a:solidFill>
+                <a:latin typeface="Arial" panose="020B0604020202020204"/>
+                <a:ea typeface="微软雅黑" panose="020B0503020204020204" charset="-122"/>
+                <a:cs typeface="Arial" panose="020B0604020202020204"/>
+              </a:endParaRPr>
+            </a:p>
+            <a:p>
+              <a:pPr algn="l"/>
+              <a:r>
+                <a:rPr lang="zh-CN" sz="1650" dirty="0">
+                  <a:solidFill>
+                    <a:srgbClr val="0F1423"/>
+                  </a:solidFill>
+                  <a:latin typeface="Arial" panose="020B0604020202020204"/>
+                  <a:ea typeface="微软雅黑" panose="020B0503020204020204" charset="-122"/>
+                  <a:cs typeface="Arial" panose="020B0604020202020204"/>
+                </a:rPr>
+                <a:t>LM connector、prefix cache，并横向比较 Flex</a:t>
+              </a:r>
+              <a:endParaRPr lang="zh-CN" sz="1650" dirty="0">
+                <a:solidFill>
+                  <a:srgbClr val="0F1423"/>
+                </a:solidFill>
+                <a:latin typeface="Arial" panose="020B0604020202020204"/>
+                <a:ea typeface="微软雅黑" panose="020B0503020204020204" charset="-122"/>
+                <a:cs typeface="Arial" panose="020B0604020202020204"/>
+              </a:endParaRPr>
+            </a:p>
+            <a:p>
+              <a:pPr algn="l"/>
+              <a:r>
+                <a:rPr lang="en-US" altLang="zh-CN" sz="1650" dirty="0">
+                  <a:solidFill>
+                    <a:srgbClr val="0F1423"/>
+                  </a:solidFill>
+                  <a:latin typeface="Arial" panose="020B0604020202020204"/>
+                  <a:ea typeface="微软雅黑" panose="020B0503020204020204" charset="-122"/>
+                  <a:cs typeface="Arial" panose="020B0604020202020204"/>
+                </a:rPr>
+                <a:t>-</a:t>
+              </a:r>
+              <a:r>
+                <a:rPr lang="zh-CN" sz="1650" dirty="0">
+                  <a:solidFill>
+                    <a:srgbClr val="0F1423"/>
+                  </a:solidFill>
+                  <a:latin typeface="Arial" panose="020B0604020202020204"/>
+                  <a:ea typeface="微软雅黑" panose="020B0503020204020204" charset="-122"/>
+                  <a:cs typeface="Arial" panose="020B0604020202020204"/>
+                </a:rPr>
+                <a:t>KV、LMCache、Mooncake 等方案。</a:t>
               </a:r>
               <a:endParaRPr lang="zh-CN" sz="1650" dirty="0">
                 <a:solidFill>
@@ -26828,8 +26992,8 @@
           </p:nvSpPr>
           <p:spPr>
             <a:xfrm>
-              <a:off x="7516368" y="2526982"/>
-              <a:ext cx="1604943" cy="322707"/>
+              <a:off x="7515860" y="1780540"/>
+              <a:ext cx="2047875" cy="761365"/>
             </a:xfrm>
             <a:prstGeom prst="rect">
               <a:avLst/>
@@ -26840,7 +27004,7 @@
             </a:ln>
           </p:spPr>
           <p:txBody>
-            <a:bodyPr wrap="none" lIns="0" tIns="0" rIns="0" bIns="0" anchor="t" anchorCtr="0">
+            <a:bodyPr wrap="square" lIns="0" tIns="0" rIns="0" bIns="0" anchor="t" anchorCtr="0">
               <a:spAutoFit/>
             </a:bodyPr>
             <a:lstStyle/>
@@ -26855,7 +27019,7 @@
                   <a:ea typeface="微软雅黑" panose="020B0503020204020204" charset="-122"/>
                   <a:cs typeface="Arial" panose="020B0604020202020204"/>
                 </a:rPr>
-                <a:t>祁馨叶 / 徐子淳</a:t>
+                <a:t>确定 vLLM V1 connector + 三层缓存路线</a:t>
               </a:r>
               <a:endParaRPr lang="zh-CN" sz="1650" dirty="0">
                 <a:solidFill>
@@ -26876,7 +27040,7 @@
           </p:nvSpPr>
           <p:spPr>
             <a:xfrm>
-              <a:off x="9810750" y="2400300"/>
+              <a:off x="9837420" y="1816100"/>
               <a:ext cx="1066800" cy="419100"/>
             </a:xfrm>
             <a:prstGeom prst="roundRect">
@@ -26900,7 +27064,7 @@
           </p:nvSpPr>
           <p:spPr>
             <a:xfrm>
-              <a:off x="10002583" y="2498408"/>
+              <a:off x="10029253" y="1914208"/>
               <a:ext cx="683133" cy="322707"/>
             </a:xfrm>
             <a:prstGeom prst="rect">
@@ -26927,7 +27091,7 @@
                   <a:ea typeface="微软雅黑" panose="020B0503020204020204" charset="-122"/>
                   <a:cs typeface="Arial" panose="020B0604020202020204"/>
                 </a:rPr>
-                <a:t>已完成</a:t>
+                <a:t>完成</a:t>
               </a:r>
               <a:endParaRPr lang="zh-CN" sz="1650" dirty="0">
                 <a:solidFill>
@@ -26949,10 +27113,10 @@
         </p:nvGrpSpPr>
         <p:grpSpPr>
           <a:xfrm>
-            <a:off x="685800" y="3048000"/>
-            <a:ext cx="10820400" cy="838200"/>
-            <a:chOff x="685800" y="3048000"/>
-            <a:chExt cx="10820400" cy="838200"/>
+            <a:off x="685800" y="2647315"/>
+            <a:ext cx="10820400" cy="1363980"/>
+            <a:chOff x="685800" y="2868930"/>
+            <a:chExt cx="10820400" cy="1363980"/>
           </a:xfrm>
         </p:grpSpPr>
         <p:sp>
@@ -26963,8 +27127,8 @@
           </p:nvSpPr>
           <p:spPr>
             <a:xfrm>
-              <a:off x="685800" y="3048000"/>
-              <a:ext cx="10820400" cy="838200"/>
+              <a:off x="685800" y="2868930"/>
+              <a:ext cx="10820400" cy="1357630"/>
             </a:xfrm>
             <a:prstGeom prst="rect">
               <a:avLst/>
@@ -26978,6 +27142,12 @@
               </a:solidFill>
             </a:ln>
           </p:spPr>
+          <p:txBody>
+            <a:bodyPr/>
+            <a:p>
+              <a:endParaRPr lang="zh-CN" altLang="en-US"/>
+            </a:p>
+          </p:txBody>
         </p:sp>
         <p:sp>
           <p:nvSpPr>
@@ -26987,7 +27157,7 @@
           </p:nvSpPr>
           <p:spPr>
             <a:xfrm>
-              <a:off x="1038606" y="3309620"/>
+              <a:off x="1038606" y="3130550"/>
               <a:ext cx="745236" cy="352044"/>
             </a:xfrm>
             <a:prstGeom prst="rect">
@@ -27014,7 +27184,7 @@
                   <a:ea typeface="黑体" panose="02010609060101010101" charset="-122"/>
                   <a:cs typeface="Arial" panose="020B0604020202020204"/>
                 </a:rPr>
-                <a:t>阶段二</a:t>
+                <a:t>结构搭建</a:t>
               </a:r>
               <a:endParaRPr lang="zh-CN" sz="1800" dirty="0">
                 <a:solidFill>
@@ -27035,8 +27205,8 @@
           </p:nvSpPr>
           <p:spPr>
             <a:xfrm>
-              <a:off x="2642870" y="3244215"/>
-              <a:ext cx="4495800" cy="507365"/>
+              <a:off x="2665095" y="2963545"/>
+              <a:ext cx="4495800" cy="1269365"/>
             </a:xfrm>
             <a:prstGeom prst="rect">
               <a:avLst/>
@@ -27055,6 +27225,25 @@
               <a:pPr algn="l"/>
               <a:r>
                 <a:rPr lang="zh-CN" sz="1650" dirty="0">
+                  <a:ln/>
+                  <a:solidFill>
+                    <a:schemeClr val="accent1"/>
+                  </a:solidFill>
+                  <a:effectLst>
+                    <a:outerShdw blurRad="38100" dist="25400" dir="5400000" algn="ctr" rotWithShape="0">
+                      <a:srgbClr val="6E747A">
+                        <a:alpha val="43000"/>
+                      </a:srgbClr>
+                    </a:outerShdw>
+                  </a:effectLst>
+                  <a:latin typeface="Arial" panose="020B0604020202020204"/>
+                  <a:ea typeface="微软雅黑" panose="020B0503020204020204" charset="-122"/>
+                  <a:cs typeface="Arial" panose="020B0604020202020204"/>
+                </a:rPr>
+                <a:t>4.8 - 4.28</a:t>
+              </a:r>
+              <a:r>
+                <a:rPr lang="zh-CN" sz="1650" dirty="0">
                   <a:solidFill>
                     <a:srgbClr val="0F1423"/>
                   </a:solidFill>
@@ -27062,7 +27251,7 @@
                   <a:ea typeface="微软雅黑" panose="020B0503020204020204" charset="-122"/>
                   <a:cs typeface="Arial" panose="020B0604020202020204"/>
                 </a:rPr>
-                <a:t>方案设计、系统边界划分、模块分层与实现路径确定</a:t>
+                <a:t>：搭建项目仓库与基础环境，梳理 Python、C++ / CUDA 扩展与测试结构；分析 KV Cache 生命周期、调度关系与关键调用路径，完成 MiniFlex 架构设计与 connector 链路初步实现。</a:t>
               </a:r>
               <a:endParaRPr lang="zh-CN" sz="1650" dirty="0">
                 <a:solidFill>
@@ -27083,7 +27272,7 @@
           </p:nvSpPr>
           <p:spPr>
             <a:xfrm>
-              <a:off x="7516368" y="3365182"/>
+              <a:off x="7484618" y="3328352"/>
               <a:ext cx="683133" cy="322707"/>
             </a:xfrm>
             <a:prstGeom prst="rect">
@@ -27110,7 +27299,7 @@
                   <a:ea typeface="微软雅黑" panose="020B0503020204020204" charset="-122"/>
                   <a:cs typeface="Arial" panose="020B0604020202020204"/>
                 </a:rPr>
-                <a:t>井光成</a:t>
+                <a:t>形成模块化框架</a:t>
               </a:r>
               <a:endParaRPr lang="zh-CN" sz="1650" dirty="0">
                 <a:solidFill>
@@ -27131,7 +27320,7 @@
           </p:nvSpPr>
           <p:spPr>
             <a:xfrm>
-              <a:off x="9810750" y="3238500"/>
+              <a:off x="9810750" y="3244215"/>
               <a:ext cx="1066800" cy="419100"/>
             </a:xfrm>
             <a:prstGeom prst="roundRect">
@@ -27155,7 +27344,7 @@
           </p:nvSpPr>
           <p:spPr>
             <a:xfrm>
-              <a:off x="10002583" y="3336608"/>
+              <a:off x="10002583" y="3342323"/>
               <a:ext cx="683133" cy="322707"/>
             </a:xfrm>
             <a:prstGeom prst="rect">
@@ -27182,7 +27371,7 @@
                   <a:ea typeface="微软雅黑" panose="020B0503020204020204" charset="-122"/>
                   <a:cs typeface="Arial" panose="020B0604020202020204"/>
                 </a:rPr>
-                <a:t>已完成</a:t>
+                <a:t>完成</a:t>
               </a:r>
               <a:endParaRPr lang="zh-CN" sz="1650" dirty="0">
                 <a:solidFill>
@@ -27204,10 +27393,10 @@
         </p:nvGrpSpPr>
         <p:grpSpPr>
           <a:xfrm>
-            <a:off x="685800" y="3886200"/>
-            <a:ext cx="10820400" cy="838200"/>
+            <a:off x="685800" y="4036060"/>
+            <a:ext cx="10820400" cy="1257195"/>
             <a:chOff x="685800" y="3886200"/>
-            <a:chExt cx="10820400" cy="838200"/>
+            <a:chExt cx="10820400" cy="1397000"/>
           </a:xfrm>
         </p:grpSpPr>
         <p:sp>
@@ -27219,7 +27408,7 @@
           <p:spPr>
             <a:xfrm>
               <a:off x="685800" y="3886200"/>
-              <a:ext cx="10820400" cy="838200"/>
+              <a:ext cx="10820400" cy="1397000"/>
             </a:xfrm>
             <a:prstGeom prst="rect">
               <a:avLst/>
@@ -27233,6 +27422,12 @@
               </a:solidFill>
             </a:ln>
           </p:spPr>
+          <p:txBody>
+            <a:bodyPr/>
+            <a:p>
+              <a:endParaRPr lang="zh-CN" altLang="en-US"/>
+            </a:p>
+          </p:txBody>
         </p:sp>
         <p:sp>
           <p:nvSpPr>
@@ -27242,8 +27437,8 @@
           </p:nvSpPr>
           <p:spPr>
             <a:xfrm>
-              <a:off x="1038606" y="4187190"/>
-              <a:ext cx="745236" cy="352044"/>
+              <a:off x="1038860" y="4187497"/>
+              <a:ext cx="980440" cy="307648"/>
             </a:xfrm>
             <a:prstGeom prst="rect">
               <a:avLst/>
@@ -27254,7 +27449,7 @@
             </a:ln>
           </p:spPr>
           <p:txBody>
-            <a:bodyPr wrap="none" lIns="0" tIns="0" rIns="0" bIns="0" anchor="t" anchorCtr="0">
+            <a:bodyPr wrap="square" lIns="0" tIns="0" rIns="0" bIns="0" anchor="t" anchorCtr="0">
               <a:spAutoFit/>
             </a:bodyPr>
             <a:lstStyle/>
@@ -27269,7 +27464,7 @@
                   <a:ea typeface="黑体" panose="02010609060101010101" charset="-122"/>
                   <a:cs typeface="Arial" panose="020B0604020202020204"/>
                 </a:rPr>
-                <a:t>阶段三</a:t>
+                <a:t>核心开发</a:t>
               </a:r>
               <a:endParaRPr lang="zh-CN" sz="1800" dirty="0">
                 <a:solidFill>
@@ -27290,8 +27485,75 @@
           </p:nvSpPr>
           <p:spPr>
             <a:xfrm>
-              <a:off x="2615565" y="4116705"/>
-              <a:ext cx="4545330" cy="507365"/>
+              <a:off x="2615565" y="4016508"/>
+              <a:ext cx="4545330" cy="1128277"/>
+            </a:xfrm>
+            <a:prstGeom prst="rect">
+              <a:avLst/>
+            </a:prstGeom>
+            <a:noFill/>
+            <a:ln>
+              <a:noFill/>
+            </a:ln>
+          </p:spPr>
+          <p:txBody>
+            <a:bodyPr wrap="square" lIns="0" tIns="0" rIns="0" bIns="0" anchor="t" anchorCtr="0">
+              <a:spAutoFit/>
+            </a:bodyPr>
+            <a:lstStyle/>
+            <a:p>
+              <a:pPr algn="l"/>
+              <a:r>
+                <a:rPr lang="zh-CN" sz="1650" dirty="0">
+                  <a:ln/>
+                  <a:solidFill>
+                    <a:schemeClr val="accent1"/>
+                  </a:solidFill>
+                  <a:effectLst>
+                    <a:outerShdw blurRad="38100" dist="25400" dir="5400000" algn="ctr" rotWithShape="0">
+                      <a:srgbClr val="6E747A">
+                        <a:alpha val="43000"/>
+                      </a:srgbClr>
+                    </a:outerShdw>
+                  </a:effectLst>
+                  <a:latin typeface="Arial" panose="020B0604020202020204"/>
+                  <a:ea typeface="微软雅黑" panose="020B0503020204020204" charset="-122"/>
+                  <a:cs typeface="Arial" panose="020B0604020202020204"/>
+                </a:rPr>
+                <a:t>4.29 - 5.31</a:t>
+              </a:r>
+              <a:r>
+                <a:rPr lang="zh-CN" sz="1650" dirty="0">
+                  <a:solidFill>
+                    <a:srgbClr val="0F1423"/>
+                  </a:solidFill>
+                  <a:latin typeface="Arial" panose="020B0604020202020204"/>
+                  <a:ea typeface="微软雅黑" panose="020B0503020204020204" charset="-122"/>
+                  <a:cs typeface="Arial" panose="020B0604020202020204"/>
+                </a:rPr>
+                <a:t>：实现 block 级 KV Cache 管理机制，维护元数据、状态流转与命中回填；完成 SSD 路径设计，建立 GPU / CPU / SSD 三层缓存协同机制，并打通 GPU↔CPU↔SSD 关键传输链路。</a:t>
+              </a:r>
+              <a:endParaRPr lang="zh-CN" sz="1650" dirty="0">
+                <a:solidFill>
+                  <a:srgbClr val="0F1423"/>
+                </a:solidFill>
+                <a:latin typeface="Arial" panose="020B0604020202020204"/>
+                <a:ea typeface="微软雅黑" panose="020B0503020204020204" charset="-122"/>
+                <a:cs typeface="Arial" panose="020B0604020202020204"/>
+              </a:endParaRPr>
+            </a:p>
+          </p:txBody>
+        </p:sp>
+        <p:sp>
+          <p:nvSpPr>
+            <p:cNvPr id="28" name="TextBox 28"/>
+            <p:cNvSpPr txBox="1"/>
+            <p:nvPr/>
+          </p:nvSpPr>
+          <p:spPr>
+            <a:xfrm>
+              <a:off x="7516495" y="4203065"/>
+              <a:ext cx="2047875" cy="563786"/>
             </a:xfrm>
             <a:prstGeom prst="rect">
               <a:avLst/>
@@ -27317,55 +27579,7 @@
                   <a:ea typeface="微软雅黑" panose="020B0503020204020204" charset="-122"/>
                   <a:cs typeface="Arial" panose="020B0604020202020204"/>
                 </a:rPr>
-                <a:t>vLLM 接入、缓存管理、传输链路与布局适配实现，核心模块开发</a:t>
-              </a:r>
-              <a:endParaRPr lang="zh-CN" sz="1650" dirty="0">
-                <a:solidFill>
-                  <a:srgbClr val="0F1423"/>
-                </a:solidFill>
-                <a:latin typeface="Arial" panose="020B0604020202020204"/>
-                <a:ea typeface="微软雅黑" panose="020B0503020204020204" charset="-122"/>
-                <a:cs typeface="Arial" panose="020B0604020202020204"/>
-              </a:endParaRPr>
-            </a:p>
-          </p:txBody>
-        </p:sp>
-        <p:sp>
-          <p:nvSpPr>
-            <p:cNvPr id="28" name="TextBox 28"/>
-            <p:cNvSpPr txBox="1"/>
-            <p:nvPr/>
-          </p:nvSpPr>
-          <p:spPr>
-            <a:xfrm>
-              <a:off x="7516368" y="4203382"/>
-              <a:ext cx="683133" cy="322707"/>
-            </a:xfrm>
-            <a:prstGeom prst="rect">
-              <a:avLst/>
-            </a:prstGeom>
-            <a:noFill/>
-            <a:ln>
-              <a:noFill/>
-            </a:ln>
-          </p:spPr>
-          <p:txBody>
-            <a:bodyPr wrap="none" lIns="0" tIns="0" rIns="0" bIns="0" anchor="t" anchorCtr="0">
-              <a:spAutoFit/>
-            </a:bodyPr>
-            <a:lstStyle/>
-            <a:p>
-              <a:pPr algn="l"/>
-              <a:r>
-                <a:rPr lang="zh-CN" sz="1650" dirty="0">
-                  <a:solidFill>
-                    <a:srgbClr val="0F1423"/>
-                  </a:solidFill>
-                  <a:latin typeface="Arial" panose="020B0604020202020204"/>
-                  <a:ea typeface="微软雅黑" panose="020B0503020204020204" charset="-122"/>
-                  <a:cs typeface="Arial" panose="020B0604020202020204"/>
-                </a:rPr>
-                <a:t>井光成</a:t>
+                <a:t>完成核心模块与稳定性修复</a:t>
               </a:r>
               <a:endParaRPr lang="zh-CN" sz="1650" dirty="0">
                 <a:solidFill>
@@ -27386,7 +27600,7 @@
           </p:nvSpPr>
           <p:spPr>
             <a:xfrm>
-              <a:off x="9810750" y="4076700"/>
+              <a:off x="9810750" y="4282739"/>
               <a:ext cx="1066800" cy="419100"/>
             </a:xfrm>
             <a:prstGeom prst="roundRect">
@@ -27410,8 +27624,8 @@
           </p:nvSpPr>
           <p:spPr>
             <a:xfrm>
-              <a:off x="10029825" y="4174808"/>
-              <a:ext cx="628650" cy="253365"/>
+              <a:off x="10029825" y="4380847"/>
+              <a:ext cx="628650" cy="281540"/>
             </a:xfrm>
             <a:prstGeom prst="rect">
               <a:avLst/>
@@ -27422,7 +27636,7 @@
             </a:ln>
           </p:spPr>
           <p:txBody>
-            <a:bodyPr wrap="none" lIns="0" tIns="0" rIns="0" bIns="0" anchor="t" anchorCtr="0">
+            <a:bodyPr wrap="square" lIns="0" tIns="0" rIns="0" bIns="0" anchor="t" anchorCtr="0">
               <a:spAutoFit/>
             </a:bodyPr>
             <a:lstStyle/>
@@ -27437,7 +27651,7 @@
                   <a:ea typeface="微软雅黑" panose="020B0503020204020204" charset="-122"/>
                   <a:cs typeface="Arial" panose="020B0604020202020204"/>
                 </a:rPr>
-                <a:t>已完成</a:t>
+                <a:t>完成</a:t>
               </a:r>
               <a:endParaRPr lang="zh-CN" sz="1650" dirty="0">
                 <a:solidFill>
@@ -27459,10 +27673,10 @@
         </p:nvGrpSpPr>
         <p:grpSpPr>
           <a:xfrm>
-            <a:off x="685800" y="4724400"/>
-            <a:ext cx="10820400" cy="838200"/>
+            <a:off x="685800" y="5210810"/>
+            <a:ext cx="10820400" cy="1280160"/>
             <a:chOff x="685800" y="4724400"/>
-            <a:chExt cx="10820400" cy="838200"/>
+            <a:chExt cx="10820400" cy="1280160"/>
           </a:xfrm>
         </p:grpSpPr>
         <p:sp>
@@ -27474,7 +27688,7 @@
           <p:spPr>
             <a:xfrm>
               <a:off x="685800" y="4724400"/>
-              <a:ext cx="10820400" cy="838200"/>
+              <a:ext cx="10820400" cy="1280160"/>
             </a:xfrm>
             <a:prstGeom prst="rect">
               <a:avLst/>
@@ -27488,6 +27702,12 @@
               </a:solidFill>
             </a:ln>
           </p:spPr>
+          <p:txBody>
+            <a:bodyPr/>
+            <a:p>
+              <a:endParaRPr lang="zh-CN" altLang="en-US"/>
+            </a:p>
+          </p:txBody>
         </p:sp>
         <p:sp>
           <p:nvSpPr>
@@ -27524,7 +27744,7 @@
                   <a:ea typeface="黑体" panose="02010609060101010101" charset="-122"/>
                   <a:cs typeface="Arial" panose="020B0604020202020204"/>
                 </a:rPr>
-                <a:t>阶段四</a:t>
+                <a:t>联调验证</a:t>
               </a:r>
               <a:endParaRPr lang="zh-CN" sz="1800" dirty="0">
                 <a:solidFill>
@@ -27565,6 +27785,25 @@
               <a:pPr algn="l"/>
               <a:r>
                 <a:rPr lang="zh-CN" sz="1650" dirty="0">
+                  <a:ln/>
+                  <a:solidFill>
+                    <a:schemeClr val="accent1"/>
+                  </a:solidFill>
+                  <a:effectLst>
+                    <a:outerShdw blurRad="38100" dist="25400" dir="5400000" algn="ctr" rotWithShape="0">
+                      <a:srgbClr val="6E747A">
+                        <a:alpha val="43000"/>
+                      </a:srgbClr>
+                    </a:outerShdw>
+                  </a:effectLst>
+                  <a:latin typeface="Arial" panose="020B0604020202020204"/>
+                  <a:ea typeface="微软雅黑" panose="020B0503020204020204" charset="-122"/>
+                  <a:cs typeface="Arial" panose="020B0604020202020204"/>
+                </a:rPr>
+                <a:t>6.1 - 6.30</a:t>
+              </a:r>
+              <a:r>
+                <a:rPr lang="zh-CN" sz="1650" dirty="0">
                   <a:solidFill>
                     <a:srgbClr val="0F1423"/>
                   </a:solidFill>
@@ -27572,7 +27811,7 @@
                   <a:ea typeface="微软雅黑" panose="020B0503020204020204" charset="-122"/>
                   <a:cs typeface="Arial" panose="020B0604020202020204"/>
                 </a:rPr>
-                <a:t>正确性验证、性能测试、结果整理与汇报材料组织</a:t>
+                <a:t>：补全命中、写回、回填与淘汰等核心逻辑，完成与 vLLM 的兼容适配；设计长上下文、超容量工作集和混合负载三类场景，编写基准脚本并整理 README、验证报告和展示材料。</a:t>
               </a:r>
               <a:endParaRPr lang="zh-CN" sz="1650" dirty="0">
                 <a:solidFill>
@@ -27593,8 +27832,8 @@
           </p:nvSpPr>
           <p:spPr>
             <a:xfrm>
-              <a:off x="7516368" y="5041582"/>
-              <a:ext cx="1604943" cy="322707"/>
+              <a:off x="7516495" y="5041265"/>
+              <a:ext cx="1997075" cy="507365"/>
             </a:xfrm>
             <a:prstGeom prst="rect">
               <a:avLst/>
@@ -27605,7 +27844,7 @@
             </a:ln>
           </p:spPr>
           <p:txBody>
-            <a:bodyPr wrap="none" lIns="0" tIns="0" rIns="0" bIns="0" anchor="t" anchorCtr="0">
+            <a:bodyPr wrap="square" lIns="0" tIns="0" rIns="0" bIns="0" anchor="t" anchorCtr="0">
               <a:spAutoFit/>
             </a:bodyPr>
             <a:lstStyle/>
@@ -27620,7 +27859,7 @@
                   <a:ea typeface="微软雅黑" panose="020B0503020204020204" charset="-122"/>
                   <a:cs typeface="Arial" panose="020B0604020202020204"/>
                 </a:rPr>
-                <a:t>徐子淳 / 祁馨叶</a:t>
+                <a:t>形成闭环验证与比赛材料</a:t>
               </a:r>
               <a:endParaRPr lang="zh-CN" sz="1650" dirty="0">
                 <a:solidFill>
@@ -27641,7 +27880,7 @@
           </p:nvSpPr>
           <p:spPr>
             <a:xfrm>
-              <a:off x="9810750" y="4914900"/>
+              <a:off x="9783445" y="5041265"/>
               <a:ext cx="1066800" cy="419100"/>
             </a:xfrm>
             <a:prstGeom prst="roundRect">
@@ -27665,7 +27904,7 @@
           </p:nvSpPr>
           <p:spPr>
             <a:xfrm>
-              <a:off x="10002583" y="5013008"/>
+              <a:off x="9975278" y="5139373"/>
               <a:ext cx="683133" cy="322707"/>
             </a:xfrm>
             <a:prstGeom prst="rect">
@@ -27692,7 +27931,7 @@
                   <a:ea typeface="微软雅黑" panose="020B0503020204020204" charset="-122"/>
                   <a:cs typeface="Arial" panose="020B0604020202020204"/>
                 </a:rPr>
-                <a:t>已完成</a:t>
+                <a:t>完成</a:t>
               </a:r>
               <a:endParaRPr lang="zh-CN" sz="1650" dirty="0">
                 <a:solidFill>
@@ -27741,7 +27980,7 @@
                 <a:ea typeface="Arial" panose="020B0604020202020204"/>
                 <a:cs typeface="Arial" panose="020B0604020202020204"/>
               </a:rPr>
-              <a:t>09</a:t>
+              <a:t>10</a:t>
             </a:r>
             <a:endParaRPr lang="en-US" sz="1200" dirty="0">
               <a:solidFill>
@@ -27759,6 +27998,18 @@
   <p:clrMapOvr>
     <a:masterClrMapping/>
   </p:clrMapOvr>
+  <mc:AlternateContent xmlns:mc="http://schemas.openxmlformats.org/markup-compatibility/2006">
+    <mc:Choice xmlns:p14="http://schemas.microsoft.com/office/powerpoint/2010/main" Requires="p14">
+      <p:transition p14:dur="500">
+        <p:fade/>
+      </p:transition>
+    </mc:Choice>
+    <mc:Fallback>
+      <p:transition>
+        <p:fade/>
+      </p:transition>
+    </mc:Fallback>
+  </mc:AlternateContent>
 </p:sld>
 </file>
 
